--- a/02-项目会/和趣社群店铺三场景产品蓝图同步会.pptx
+++ b/02-项目会/和趣社群店铺三场景产品蓝图同步会.pptx
@@ -2883,7 +2883,7 @@
                 <a:ea typeface="Microsoft YaHei UI"/>
                 <a:cs typeface="Microsoft YaHei UI"/>
               </a:rPr>
-              <a:t>和趣要做统一交易底座上的双通道社群生意平台</a:t>
+              <a:t>和趣私域社群变现平台</a:t>
             </a:r>
           </a:p>
         </p:txBody>
@@ -2947,7 +2947,7 @@
                 <a:ea typeface="Microsoft YaHei UI"/>
                 <a:cs typeface="Microsoft YaHei UI"/>
               </a:rPr>
-              <a:t>V1 同一微信小程序承载 C 端消费和 B 端经营；后续扩展团长 App 与微信、小红书、抖音小程序消费入口，所有端共用商品库、订单、售后、归因和收益账本。</a:t>
+              <a:t>帮助已有社群经营者和零基础新手群主，通过社群冷启动、商品库、开团发布、分销帮卖、订单履约、售后结算，完成私域社群生意变现。</a:t>
             </a:r>
           </a:p>
         </p:txBody>
@@ -3044,7 +3044,7 @@
                 <a:ea typeface="Microsoft YaHei UI"/>
                 <a:cs typeface="Microsoft YaHei UI"/>
               </a:rPr>
-              <a:t>C/B</a:t>
+              <a:t>私域</a:t>
             </a:r>
           </a:p>
         </p:txBody>
@@ -3108,7 +3108,7 @@
                 <a:ea typeface="Microsoft YaHei UI"/>
                 <a:cs typeface="Microsoft YaHei UI"/>
               </a:rPr>
-              <a:t>微信小程序双通道</a:t>
+              <a:t>社群变现</a:t>
             </a:r>
           </a:p>
         </p:txBody>
@@ -3205,7 +3205,7 @@
                 <a:ea typeface="Microsoft YaHei UI"/>
                 <a:cs typeface="Microsoft YaHei UI"/>
               </a:rPr>
-              <a:t>1</a:t>
+              <a:t>交易</a:t>
             </a:r>
           </a:p>
         </p:txBody>
@@ -3269,7 +3269,7 @@
                 <a:ea typeface="Microsoft YaHei UI"/>
                 <a:cs typeface="Microsoft YaHei UI"/>
               </a:rPr>
-              <a:t>统一交易底座</a:t>
+              <a:t>交易闭环</a:t>
             </a:r>
           </a:p>
         </p:txBody>
@@ -3366,7 +3366,7 @@
                 <a:ea typeface="Microsoft YaHei UI"/>
                 <a:cs typeface="Microsoft YaHei UI"/>
               </a:rPr>
-              <a:t>App</a:t>
+              <a:t>履约</a:t>
             </a:r>
           </a:p>
         </p:txBody>
@@ -3430,7 +3430,7 @@
                 <a:ea typeface="Microsoft YaHei UI"/>
                 <a:cs typeface="Microsoft YaHei UI"/>
               </a:rPr>
-              <a:t>后期团长经营</a:t>
+              <a:t>售后结算</a:t>
             </a:r>
           </a:p>
         </p:txBody>
@@ -3527,7 +3527,7 @@
                 <a:ea typeface="Microsoft YaHei UI"/>
                 <a:cs typeface="Microsoft YaHei UI"/>
               </a:rPr>
-              <a:t>多端</a:t>
+              <a:t>增长</a:t>
             </a:r>
           </a:p>
         </p:txBody>
@@ -3591,7 +3591,7 @@
                 <a:ea typeface="Microsoft YaHei UI"/>
                 <a:cs typeface="Microsoft YaHei UI"/>
               </a:rPr>
-              <a:t>C端消费入口</a:t>
+              <a:t>复购经营</a:t>
             </a:r>
           </a:p>
         </p:txBody>
@@ -4001,7 +4001,7 @@
                 <a:ea typeface="Microsoft YaHei UI"/>
                 <a:cs typeface="Microsoft YaHei UI"/>
               </a:rPr>
-              <a:t>统一交易底座</a:t>
+              <a:t>交易闭环</a:t>
             </a:r>
           </a:p>
         </p:txBody>
@@ -8850,7 +8850,7 @@
                 <a:ea typeface="Microsoft YaHei UI"/>
                 <a:cs typeface="Microsoft YaHei UI"/>
               </a:rPr>
-              <a:t>活动变现是微信 C 端优先承接的主验证场景</a:t>
+              <a:t>活动变现类型要支撑不同社群和后续选品中心</a:t>
             </a:r>
           </a:p>
         </p:txBody>
@@ -8914,7 +8914,7 @@
                 <a:ea typeface="Microsoft YaHei UI"/>
                 <a:cs typeface="Microsoft YaHei UI"/>
               </a:rPr>
-              <a:t>活动天然适合社群分享和小程序报名，后续可按内容平台来源扩展展示入口。</a:t>
+              <a:t>活动不只做亲子、青年、创业三类，首发用白名单控制风险，后续按数据受控扩展。</a:t>
             </a:r>
           </a:p>
         </p:txBody>
@@ -9108,7 +9108,7 @@
                 <a:ea typeface="Microsoft YaHei UI"/>
                 <a:cs typeface="Microsoft YaHei UI"/>
               </a:rPr>
-              <a:t>• 亲子活动</a:t>
+              <a:t>• 亲子家庭：手作、研学、儿童剧/展览、亲子运动</a:t>
             </a:r>
           </a:p>
         </p:txBody>
@@ -9172,7 +9172,7 @@
                 <a:ea typeface="Microsoft YaHei UI"/>
                 <a:cs typeface="Microsoft YaHei UI"/>
               </a:rPr>
-              <a:t>• 青年兴趣活动</a:t>
+              <a:t>• 青年兴趣：Citywalk、桌游、摄影、音乐/观影</a:t>
             </a:r>
           </a:p>
         </p:txBody>
@@ -9236,7 +9236,7 @@
                 <a:ea typeface="Microsoft YaHei UI"/>
                 <a:cs typeface="Microsoft YaHei UI"/>
               </a:rPr>
-              <a:t>• 创业交流活动</a:t>
+              <a:t>• 创业职场：沙龙、资源对接、路演、工作坊</a:t>
             </a:r>
           </a:p>
         </p:txBody>
@@ -9300,7 +9300,7 @@
                 <a:ea typeface="Microsoft YaHei UI"/>
                 <a:cs typeface="Microsoft YaHei UI"/>
               </a:rPr>
-              <a:t>• 场次/票种/名额</a:t>
+              <a:t>• 社区生活：邻里集市、体验课、节日主题活动</a:t>
             </a:r>
           </a:p>
         </p:txBody>
@@ -9364,7 +9364,7 @@
                 <a:ea typeface="Microsoft YaHei UI"/>
                 <a:cs typeface="Microsoft YaHei UI"/>
               </a:rPr>
-              <a:t>• 购买须知和保险</a:t>
+              <a:t>• 受控扩展：文旅休闲、健康运动、学习成长</a:t>
             </a:r>
           </a:p>
         </p:txBody>
@@ -9428,7 +9428,7 @@
                 <a:ea typeface="Microsoft YaHei UI"/>
                 <a:cs typeface="Microsoft YaHei UI"/>
               </a:rPr>
-              <a:t>• 到场核销与退款工单</a:t>
+              <a:t>• 暂不开放：高风险户外、多日行程、强效果承诺</a:t>
             </a:r>
           </a:p>
         </p:txBody>
@@ -13728,7 +13728,7 @@
                 <a:ea typeface="Microsoft YaHei UI"/>
                 <a:cs typeface="Microsoft YaHei UI"/>
               </a:rPr>
-              <a:t>这次同步产品形态和多端架构边界</a:t>
+              <a:t>这次让全员理解私域社群变现主线</a:t>
             </a:r>
           </a:p>
         </p:txBody>
@@ -13792,7 +13792,7 @@
                 <a:ea typeface="Microsoft YaHei UI"/>
                 <a:cs typeface="Microsoft YaHei UI"/>
               </a:rPr>
-              <a:t>重点是让全员理解：多端不是多套系统，而是一个交易底座上的不同入口。</a:t>
+              <a:t>重点是讲清项目做什么、给谁变现、靠什么功能成交、先做什么、后做什么。</a:t>
             </a:r>
           </a:p>
         </p:txBody>
@@ -14017,7 +14017,7 @@
                 <a:ea typeface="Microsoft YaHei UI"/>
                 <a:cs typeface="Microsoft YaHei UI"/>
               </a:rPr>
-              <a:t>同一微信小程序内承载 C 端消费通道 + B 端经营通道</a:t>
+              <a:t>社群冷启动 + 商品库 + 开团发布 + 订单履约 + 售后结算</a:t>
             </a:r>
           </a:p>
         </p:txBody>
@@ -14178,7 +14178,7 @@
                 <a:ea typeface="Microsoft YaHei UI"/>
                 <a:cs typeface="Microsoft YaHei UI"/>
               </a:rPr>
-              <a:t>团长 App 承接重度经营、选品、订单售后、收益和数据</a:t>
+              <a:t>选品中心、预售/服务履约、经营效率工具</a:t>
             </a:r>
           </a:p>
         </p:txBody>
@@ -14339,7 +14339,7 @@
                 <a:ea typeface="Microsoft YaHei UI"/>
                 <a:cs typeface="Microsoft YaHei UI"/>
               </a:rPr>
-              <a:t>微信、小红书、抖音小程序承接不同消费流量</a:t>
+              <a:t>团长 App 与多平台消费入口作为后续承载能力</a:t>
             </a:r>
           </a:p>
         </p:txBody>
@@ -18480,7 +18480,7 @@
                 <a:ea typeface="Microsoft YaHei UI"/>
                 <a:cs typeface="Microsoft YaHei UI"/>
               </a:rPr>
-              <a:t>快团团可参考经营组织，多端不能照搬成多套系统</a:t>
+              <a:t>快团团可参考经营组织，但和趣主线是私域社群变现</a:t>
             </a:r>
           </a:p>
         </p:txBody>
@@ -18544,7 +18544,7 @@
                 <a:ea typeface="Microsoft YaHei UI"/>
                 <a:cs typeface="Microsoft YaHei UI"/>
               </a:rPr>
-              <a:t>和趣的核心是统一交易底座上的多端承接。</a:t>
+              <a:t>和趣借鉴商品库和开团方式，但更强调活动/卡券/服务的履约售后和结算监督。</a:t>
             </a:r>
           </a:p>
         </p:txBody>
@@ -18930,7 +18930,7 @@
                 <a:ea typeface="Microsoft YaHei UI"/>
                 <a:cs typeface="Microsoft YaHei UI"/>
               </a:rPr>
-              <a:t>C/B 双通道、团长 App、多平台消费端、统一归因</a:t>
+              <a:t>活动货盘、卡券核销、到店服务、售后服务台、收益账本</a:t>
             </a:r>
           </a:p>
         </p:txBody>
@@ -19276,7 +19276,7 @@
                 <a:ea typeface="Microsoft YaHei UI"/>
                 <a:cs typeface="Microsoft YaHei UI"/>
               </a:rPr>
-              <a:t>V1 必须跑通微信小程序 C/B 双通道</a:t>
+              <a:t>V1 必须跑通私域社群变现交易闭环</a:t>
             </a:r>
           </a:p>
         </p:txBody>
@@ -19340,7 +19340,7 @@
                 <a:ea typeface="Microsoft YaHei UI"/>
                 <a:cs typeface="Microsoft YaHei UI"/>
               </a:rPr>
-              <a:t>V1 不同时做 App 和小红书/抖音消费小程序。</a:t>
+              <a:t>先让新手和已有团长能建店、选品、开团、成交、履约、售后和看收益。</a:t>
             </a:r>
           </a:p>
         </p:txBody>
@@ -19501,7 +19501,7 @@
                 <a:ea typeface="Microsoft YaHei UI"/>
                 <a:cs typeface="Microsoft YaHei UI"/>
               </a:rPr>
-              <a:t>C端消费</a:t>
+              <a:t>消费者侧</a:t>
             </a:r>
           </a:p>
         </p:txBody>
@@ -19565,7 +19565,7 @@
                 <a:ea typeface="Microsoft YaHei UI"/>
                 <a:cs typeface="Microsoft YaHei UI"/>
               </a:rPr>
-              <a:t>店铺/下单/订单/售后</a:t>
+              <a:t>店铺/下单/核销/售后</a:t>
             </a:r>
           </a:p>
         </p:txBody>
@@ -19662,7 +19662,7 @@
                 <a:ea typeface="Microsoft YaHei UI"/>
                 <a:cs typeface="Microsoft YaHei UI"/>
               </a:rPr>
-              <a:t>B端经营</a:t>
+              <a:t>团长侧</a:t>
             </a:r>
           </a:p>
         </p:txBody>
@@ -19726,7 +19726,7 @@
                 <a:ea typeface="Microsoft YaHei UI"/>
                 <a:cs typeface="Microsoft YaHei UI"/>
               </a:rPr>
-              <a:t>冷启动/建店/开团</a:t>
+              <a:t>冷启动/建店/选品/开团</a:t>
             </a:r>
           </a:p>
         </p:txBody>
@@ -20306,7 +20306,7 @@
                 <a:ea typeface="Microsoft YaHei UI"/>
                 <a:cs typeface="Microsoft YaHei UI"/>
               </a:rPr>
-              <a:t>归因</a:t>
+              <a:t>承载方式</a:t>
             </a:r>
           </a:p>
         </p:txBody>
@@ -20370,7 +20370,7 @@
                 <a:ea typeface="Microsoft YaHei UI"/>
                 <a:cs typeface="Microsoft YaHei UI"/>
               </a:rPr>
-              <a:t>平台+团长来源</a:t>
+              <a:t>同一小程序区分身份入口</a:t>
             </a:r>
           </a:p>
         </p:txBody>
@@ -21673,7 +21673,7 @@
                 <a:ea typeface="Microsoft YaHei UI"/>
                 <a:cs typeface="Microsoft YaHei UI"/>
               </a:rPr>
-              <a:t>路线改为 V1 双通道，V3 团长 App，V4 多平台消费端</a:t>
+              <a:t>路线先做交易闭环，再做选品中心、经营效率和多端承载</a:t>
             </a:r>
           </a:p>
         </p:txBody>
@@ -21737,7 +21737,7 @@
                 <a:ea typeface="Microsoft YaHei UI"/>
                 <a:cs typeface="Microsoft YaHei UI"/>
               </a:rPr>
-              <a:t>先跑通微信内的 C/B 双通道，再扩展更重经营端和更多消费入口。</a:t>
+              <a:t>第一阶段证明私域社群能成交、能履约、能售后、能结算，再逐步放大经营效率和流量入口。</a:t>
             </a:r>
           </a:p>
         </p:txBody>
@@ -22187,7 +22187,7 @@
                 <a:ea typeface="Microsoft YaHei UI"/>
                 <a:cs typeface="Microsoft YaHei UI"/>
               </a:rPr>
-              <a:t>微信双通道</a:t>
+              <a:t>交易闭环</a:t>
             </a:r>
           </a:p>
         </p:txBody>
@@ -22251,7 +22251,7 @@
                 <a:ea typeface="Microsoft YaHei UI"/>
                 <a:cs typeface="Microsoft YaHei UI"/>
               </a:rPr>
-              <a:t>C端消费+B端经营、冷启动、交易闭环</a:t>
+              <a:t>建店、开团、订单、售后、收益</a:t>
             </a:r>
           </a:p>
         </p:txBody>
@@ -23111,7 +23111,7 @@
                 <a:ea typeface="Microsoft YaHei UI"/>
                 <a:cs typeface="Microsoft YaHei UI"/>
               </a:rPr>
-              <a:t>新增渠道一致性指标，继续用真实订单校验方向</a:t>
+              <a:t>用真实订单校验私域社群变现是否成立</a:t>
             </a:r>
           </a:p>
         </p:txBody>
@@ -23175,7 +23175,7 @@
                 <a:ea typeface="Microsoft YaHei UI"/>
                 <a:cs typeface="Microsoft YaHei UI"/>
               </a:rPr>
-              <a:t>双通道和多端最终要证明订单、售后和收益能统一管理。</a:t>
+              <a:t>指标重点看新手是否能开第一团、团长是否能持续成交、售后和收益是否可控。</a:t>
             </a:r>
           </a:p>
         </p:txBody>
@@ -23561,7 +23561,7 @@
                 <a:ea typeface="Microsoft YaHei UI"/>
                 <a:cs typeface="Microsoft YaHei UI"/>
               </a:rPr>
-              <a:t>C/B 通道切换完成率、B端开团完成率</a:t>
+              <a:t>身份入口切换完成率、团长开团完成率</a:t>
             </a:r>
           </a:p>
         </p:txBody>
@@ -24229,7 +24229,7 @@
                 <a:ea typeface="Microsoft YaHei UI"/>
                 <a:cs typeface="Microsoft YaHei UI"/>
               </a:rPr>
-              <a:t>全员共识：和趣是一套交易底座，多种前端入口</a:t>
+              <a:t>全员共识：和趣是私域社群变现平台</a:t>
             </a:r>
           </a:p>
         </p:txBody>
@@ -24293,7 +24293,7 @@
                 <a:ea typeface="Microsoft YaHei UI"/>
                 <a:cs typeface="Microsoft YaHei UI"/>
               </a:rPr>
-              <a:t>V1 先把微信小程序 C/B 双通道跑通；后续团长 App 做重度经营，小红书/抖音小程序做消费承接，但商品、订单、售后和收益始终统一。</a:t>
+              <a:t>先帮助已有团长和新手群主完成建店、选品、开团、成交、履约、售后和收益结算；双通道、团长 App 和多平台小程序只是支撑业务放大的承载方式。</a:t>
             </a:r>
           </a:p>
         </p:txBody>
@@ -24454,7 +24454,7 @@
                 <a:ea typeface="Microsoft YaHei UI"/>
                 <a:cs typeface="Microsoft YaHei UI"/>
               </a:rPr>
-              <a:t>多套系统</a:t>
+              <a:t>单点活动工具</a:t>
             </a:r>
           </a:p>
         </p:txBody>
@@ -24615,7 +24615,7 @@
                 <a:ea typeface="Microsoft YaHei UI"/>
                 <a:cs typeface="Microsoft YaHei UI"/>
               </a:rPr>
-              <a:t>两个小程序起步</a:t>
+              <a:t>普通商城</a:t>
             </a:r>
           </a:p>
         </p:txBody>
@@ -24776,7 +24776,7 @@
                 <a:ea typeface="Microsoft YaHei UI"/>
                 <a:cs typeface="Microsoft YaHei UI"/>
               </a:rPr>
-              <a:t>统一交易底座</a:t>
+              <a:t>交易闭环</a:t>
             </a:r>
           </a:p>
         </p:txBody>
@@ -24937,7 +24937,7 @@
                 <a:ea typeface="Microsoft YaHei UI"/>
                 <a:cs typeface="Microsoft YaHei UI"/>
               </a:rPr>
-              <a:t>微信C/B双通道</a:t>
+              <a:t>第一团成交</a:t>
             </a:r>
           </a:p>
         </p:txBody>
@@ -25122,7 +25122,7 @@
                 <a:ea typeface="Microsoft YaHei UI"/>
                 <a:cs typeface="Microsoft YaHei UI"/>
               </a:rPr>
-              <a:t>赛道仍是私域电商、社群团购和本地生活交易</a:t>
+              <a:t>赛道是私域社群变现、社群团购和本地生活交易</a:t>
             </a:r>
           </a:p>
         </p:txBody>
@@ -25186,7 +25186,7 @@
                 <a:ea typeface="Microsoft YaHei UI"/>
                 <a:cs typeface="Microsoft YaHei UI"/>
               </a:rPr>
-              <a:t>产品形态从单一小程序升级为统一底座上的双通道和多端入口。</a:t>
+              <a:t>项目主题不是端形态，而是把社群信任关系变成可履约、可售后、可结算的交易。</a:t>
             </a:r>
           </a:p>
         </p:txBody>
@@ -25411,7 +25411,7 @@
                 <a:ea typeface="Microsoft YaHei UI"/>
                 <a:cs typeface="Microsoft YaHei UI"/>
               </a:rPr>
-              <a:t>私域电商 / 社群团购</a:t>
+              <a:t>私域社群变现 / 社群团购</a:t>
             </a:r>
           </a:p>
         </p:txBody>
@@ -25861,7 +25861,7 @@
                 <a:ea typeface="Microsoft YaHei UI"/>
                 <a:cs typeface="Microsoft YaHei UI"/>
               </a:rPr>
-              <a:t>双通道 + 多端</a:t>
+              <a:t>交易闭环</a:t>
             </a:r>
           </a:p>
         </p:txBody>
@@ -25925,7 +25925,7 @@
                 <a:ea typeface="Microsoft YaHei UI"/>
                 <a:cs typeface="Microsoft YaHei UI"/>
               </a:rPr>
-              <a:t>经营端和消费端分工</a:t>
+              <a:t>发布、履约、售后、结算</a:t>
             </a:r>
           </a:p>
         </p:txBody>
@@ -26110,7 +26110,7 @@
                 <a:ea typeface="Microsoft YaHei UI"/>
                 <a:cs typeface="Microsoft YaHei UI"/>
               </a:rPr>
-              <a:t>公域获客变贵后，交易承接必须靠多入口和统一履约</a:t>
+              <a:t>公域获客变贵后，私域社群需要可复用的变现工具</a:t>
             </a:r>
           </a:p>
         </p:txBody>
@@ -26174,7 +26174,7 @@
                 <a:ea typeface="Microsoft YaHei UI"/>
                 <a:cs typeface="Microsoft YaHei UI"/>
               </a:rPr>
-              <a:t>消费者来自不同平台，团长需要统一经营；如果底座不统一，订单和售后会先乱掉。</a:t>
+              <a:t>已有团长需要提升交易效率，新手群主需要从第一团开始，平台要把订单、售后和收益约束住。</a:t>
             </a:r>
           </a:p>
         </p:txBody>
@@ -26399,7 +26399,7 @@
                 <a:ea typeface="Microsoft YaHei UI"/>
                 <a:cs typeface="Microsoft YaHei UI"/>
               </a:rPr>
-              <a:t>微信私域适合社群成交和复购</a:t>
+              <a:t>社群信任适合低成本触达和复购</a:t>
             </a:r>
           </a:p>
         </p:txBody>
@@ -26560,7 +26560,7 @@
                 <a:ea typeface="Microsoft YaHei UI"/>
                 <a:cs typeface="Microsoft YaHei UI"/>
               </a:rPr>
-              <a:t>小红书适合内容种草后的交易承接</a:t>
+              <a:t>商品库和开团发布降低发品门槛</a:t>
             </a:r>
           </a:p>
         </p:txBody>
@@ -26721,7 +26721,7 @@
                 <a:ea typeface="Microsoft YaHei UI"/>
                 <a:cs typeface="Microsoft YaHei UI"/>
               </a:rPr>
-              <a:t>抖音适合短视频/直播兴趣流量承接</a:t>
+              <a:t>活动、团购、卡券和服务覆盖多种变现场景</a:t>
             </a:r>
           </a:p>
         </p:txBody>
@@ -26882,7 +26882,7 @@
                 <a:ea typeface="Microsoft YaHei UI"/>
                 <a:cs typeface="Microsoft YaHei UI"/>
               </a:rPr>
-              <a:t>团长需要一个专业经营台统一看供给、订单、售后和收益</a:t>
+              <a:t>订单履约、售后退款和收益结算决定平台可信度</a:t>
             </a:r>
           </a:p>
         </p:txBody>
@@ -27067,7 +27067,7 @@
                 <a:ea typeface="Microsoft YaHei UI"/>
                 <a:cs typeface="Microsoft YaHei UI"/>
               </a:rPr>
-              <a:t>市场空间仍用 TAM/SAM/SOM，新增渠道承接口径</a:t>
+              <a:t>市场空间仍用 TAM/SAM/SOM，避免把热度当收入</a:t>
             </a:r>
           </a:p>
         </p:txBody>
@@ -27131,7 +27131,7 @@
                 <a:ea typeface="Microsoft YaHei UI"/>
                 <a:cs typeface="Microsoft YaHei UI"/>
               </a:rPr>
-              <a:t>微信小程序是 V1 主入口，小红书/抖音小程序是后续消费承接入口，不在 V1 同时建设。</a:t>
+              <a:t>私域电商和本地生活是大盘，首期只用真实订单验证和趣能切下的社群交易。</a:t>
             </a:r>
           </a:p>
         </p:txBody>
@@ -27678,7 +27678,7 @@
                 <a:ea typeface="Microsoft YaHei UI"/>
                 <a:cs typeface="Microsoft YaHei UI"/>
               </a:rPr>
-              <a:t>内容与兴趣入口</a:t>
+              <a:t>活动/团购/卡券</a:t>
             </a:r>
           </a:p>
         </p:txBody>
@@ -27903,7 +27903,7 @@
                 <a:ea typeface="Microsoft YaHei UI"/>
                 <a:cs typeface="Microsoft YaHei UI"/>
               </a:rPr>
-              <a:t>市场数据只用于方向判断，不代表已验证收入；多端入口必须共用同一交易底座。</a:t>
+              <a:t>市场数据只用于方向判断，不代表已验证收入；首期仍靠订单、退款、复购和团长留存证明成立。</a:t>
             </a:r>
           </a:p>
         </p:txBody>
@@ -28088,7 +28088,7 @@
                 <a:ea typeface="Microsoft YaHei UI"/>
                 <a:cs typeface="Microsoft YaHei UI"/>
               </a:rPr>
-              <a:t>用户仍分两条成长路径，但入口分 C 端和 B 端</a:t>
+              <a:t>用户分为已有经营者和零基础新手两条成长路径</a:t>
             </a:r>
           </a:p>
         </p:txBody>
@@ -28152,7 +28152,7 @@
                 <a:ea typeface="Microsoft YaHei UI"/>
                 <a:cs typeface="Microsoft YaHei UI"/>
               </a:rPr>
-              <a:t>消费者在 C 端完成下单与售后，团长在 B 端完成经营动作。</a:t>
+              <a:t>产品既要帮成熟团长提高效率，也要帮新手群主完成社群冷启动和第一团。</a:t>
             </a:r>
           </a:p>
         </p:txBody>
@@ -28377,7 +28377,7 @@
                 <a:ea typeface="Microsoft YaHei UI"/>
                 <a:cs typeface="Microsoft YaHei UI"/>
               </a:rPr>
-              <a:t>B 端经营：发品、开团、订单、售后、收益、数据</a:t>
+              <a:t>发品、开团、订单、售后、收益、数据</a:t>
             </a:r>
           </a:p>
         </p:txBody>
@@ -28538,7 +28538,7 @@
                 <a:ea typeface="Microsoft YaHei UI"/>
                 <a:cs typeface="Microsoft YaHei UI"/>
               </a:rPr>
-              <a:t>B 端经营：冷启动、建店、选首批供给、开第一团</a:t>
+              <a:t>冷启动、建店、选首批供给、开第一团</a:t>
             </a:r>
           </a:p>
         </p:txBody>
@@ -28699,7 +28699,7 @@
                 <a:ea typeface="Microsoft YaHei UI"/>
                 <a:cs typeface="Microsoft YaHei UI"/>
               </a:rPr>
-              <a:t>C 端消费：浏览、下单、核销、订单、售后</a:t>
+              <a:t>浏览、下单、核销、订单、售后</a:t>
             </a:r>
           </a:p>
         </p:txBody>
@@ -29045,7 +29045,7 @@
                 <a:ea typeface="Microsoft YaHei UI"/>
                 <a:cs typeface="Microsoft YaHei UI"/>
               </a:rPr>
-              <a:t>双通道解决角色错位，多端规划解决入口分散</a:t>
+              <a:t>核心痛点是不会启动、不会发品、履约售后和分钱难</a:t>
             </a:r>
           </a:p>
         </p:txBody>
@@ -29109,7 +29109,7 @@
                 <a:ea typeface="Microsoft YaHei UI"/>
                 <a:cs typeface="Microsoft YaHei UI"/>
               </a:rPr>
-              <a:t>同一小程序内区分消费和经营，后续多平台入口只做流量承接。</a:t>
+              <a:t>先把社群交易闭环做扎实，再谈多端入口和经营工具放大。</a:t>
             </a:r>
           </a:p>
         </p:txBody>
@@ -29270,7 +29270,7 @@
                 <a:ea typeface="Microsoft YaHei UI"/>
                 <a:cs typeface="Microsoft YaHei UI"/>
               </a:rPr>
-              <a:t>角色错位</a:t>
+              <a:t>起号难</a:t>
             </a:r>
           </a:p>
         </p:txBody>
@@ -29334,7 +29334,7 @@
                 <a:ea typeface="Microsoft YaHei UI"/>
                 <a:cs typeface="Microsoft YaHei UI"/>
               </a:rPr>
-              <a:t>消费者和团长看到的功能不同</a:t>
+              <a:t>新手不知道做什么社群</a:t>
             </a:r>
           </a:p>
         </p:txBody>
@@ -29431,7 +29431,7 @@
                 <a:ea typeface="Microsoft YaHei UI"/>
                 <a:cs typeface="Microsoft YaHei UI"/>
               </a:rPr>
-              <a:t>入口分散</a:t>
+              <a:t>选品难</a:t>
             </a:r>
           </a:p>
         </p:txBody>
@@ -29495,7 +29495,7 @@
                 <a:ea typeface="Microsoft YaHei UI"/>
                 <a:cs typeface="Microsoft YaHei UI"/>
               </a:rPr>
-              <a:t>微信/小红书/抖音来源不同</a:t>
+              <a:t>不知道第一团卖什么</a:t>
             </a:r>
           </a:p>
         </p:txBody>
@@ -29592,7 +29592,7 @@
                 <a:ea typeface="Microsoft YaHei UI"/>
                 <a:cs typeface="Microsoft YaHei UI"/>
               </a:rPr>
-              <a:t>订单分散</a:t>
+              <a:t>履约难</a:t>
             </a:r>
           </a:p>
         </p:txBody>
@@ -29656,7 +29656,7 @@
                 <a:ea typeface="Microsoft YaHei UI"/>
                 <a:cs typeface="Microsoft YaHei UI"/>
               </a:rPr>
-              <a:t>多端若拆系统会难售后</a:t>
+              <a:t>核销、发货、卡券分散</a:t>
             </a:r>
           </a:p>
         </p:txBody>
@@ -29753,7 +29753,7 @@
                 <a:ea typeface="Microsoft YaHei UI"/>
                 <a:cs typeface="Microsoft YaHei UI"/>
               </a:rPr>
-              <a:t>经营重</a:t>
+              <a:t>售后难</a:t>
             </a:r>
           </a:p>
         </p:txBody>
@@ -29817,7 +29817,7 @@
                 <a:ea typeface="Microsoft YaHei UI"/>
                 <a:cs typeface="Microsoft YaHei UI"/>
               </a:rPr>
-              <a:t>团长需要更专业 App</a:t>
+              <a:t>责任方和退款说不清</a:t>
             </a:r>
           </a:p>
         </p:txBody>
@@ -29914,7 +29914,7 @@
                 <a:ea typeface="Microsoft YaHei UI"/>
                 <a:cs typeface="Microsoft YaHei UI"/>
               </a:rPr>
-              <a:t>归因难</a:t>
+              <a:t>分钱难</a:t>
             </a:r>
           </a:p>
         </p:txBody>
@@ -29978,7 +29978,7 @@
                 <a:ea typeface="Microsoft YaHei UI"/>
                 <a:cs typeface="Microsoft YaHei UI"/>
               </a:rPr>
-              <a:t>平台来源和团长来源都要记</a:t>
+              <a:t>佣金、加价、优惠要算清</a:t>
             </a:r>
           </a:p>
         </p:txBody>
@@ -30324,7 +30324,7 @@
                 <a:ea typeface="Microsoft YaHei UI"/>
                 <a:cs typeface="Microsoft YaHei UI"/>
               </a:rPr>
-              <a:t>产品主线不变，入口变为 C/B 双通道</a:t>
+              <a:t>产品主线围绕私域社群如何完成变现</a:t>
             </a:r>
           </a:p>
         </p:txBody>
@@ -30388,7 +30388,7 @@
                 <a:ea typeface="Microsoft YaHei UI"/>
                 <a:cs typeface="Microsoft YaHei UI"/>
               </a:rPr>
-              <a:t>多端只是入口扩展，核心链路仍是从冷启动到复购和选品中心放大。</a:t>
+              <a:t>所有功能都围绕从社群冷启动到开团成交、履约售后、收益结算和复购经营。</a:t>
             </a:r>
           </a:p>
         </p:txBody>
@@ -30871,7 +30871,7 @@
                 <a:ea typeface="Microsoft YaHei UI"/>
                 <a:cs typeface="Microsoft YaHei UI"/>
               </a:rPr>
-              <a:t>B端建店</a:t>
+              <a:t>社群建店</a:t>
             </a:r>
           </a:p>
         </p:txBody>
@@ -31354,7 +31354,7 @@
                 <a:ea typeface="Microsoft YaHei UI"/>
                 <a:cs typeface="Microsoft YaHei UI"/>
               </a:rPr>
-              <a:t>C端下单</a:t>
+              <a:t>分享成交</a:t>
             </a:r>
           </a:p>
         </p:txBody>
